--- a/presentations/07-asm-graphics-game/07-asm-graphics-game-lecture.pptx
+++ b/presentations/07-asm-graphics-game/07-asm-graphics-game-lecture.pptx
@@ -140,7 +140,7 @@
   <p:extLst>
     <p:ext uri="{521415D9-36F7-43E2-AB2F-B90AF26B5E84}">
       <p14:sectionLst xmlns:p14="http://schemas.microsoft.com/office/powerpoint/2010/main">
-        <p14:section name="Opening" id="{b345225f-7d41-0cae-95c3-72e7814ab5ae}">
+        <p14:section name="Opening" id="{4b065bec-5637-ef2a-0f7c-0707046e892d}">
           <p14:sldIdLst>
             <p14:sldId id="256"/>
             <p14:sldId id="257"/>
@@ -150,7 +150,7 @@
             <p14:sldId id="261"/>
           </p14:sldIdLst>
         </p14:section>
-        <p14:section name="Drawing rectangles" id="{ed0531fc-d385-87b2-00e2-7e84bfac77a6}">
+        <p14:section name="Drawing rectangles" id="{c87c571a-e7a9-34bc-8285-7cfb6c149c31}">
           <p14:sldIdLst>
             <p14:sldId id="262"/>
             <p14:sldId id="263"/>
@@ -161,7 +161,7 @@
             <p14:sldId id="268"/>
           </p14:sldIdLst>
         </p14:section>
-        <p14:section name="The ball" id="{fbdff803-2f88-6147-7b6d-c9171913b560}">
+        <p14:section name="The ball" id="{196a7067-c323-7ad0-1d49-3bf3087fc338}">
           <p14:sldIdLst>
             <p14:sldId id="269"/>
             <p14:sldId id="270"/>
@@ -171,7 +171,7 @@
             <p14:sldId id="274"/>
           </p14:sldIdLst>
         </p14:section>
-        <p14:section name="Collision" id="{467a16b6-563e-e1c3-56e1-9dc84c1b4d38}">
+        <p14:section name="Collision" id="{02bfd0a1-abc0-5cff-e800-d3c00b4abf7b}">
           <p14:sldIdLst>
             <p14:sldId id="275"/>
             <p14:sldId id="276"/>
@@ -182,7 +182,7 @@
             <p14:sldId id="281"/>
           </p14:sldIdLst>
         </p14:section>
-        <p14:section name="The complete game" id="{b7a5e14c-1178-9856-af7b-035574e3c025}">
+        <p14:section name="The complete game" id="{2ab87e1a-878d-e5aa-6a54-0b891a40c611}">
           <p14:sldIdLst>
             <p14:sldId id="282"/>
             <p14:sldId id="283"/>
@@ -190,14 +190,14 @@
             <p14:sldId id="285"/>
           </p14:sldIdLst>
         </p14:section>
-        <p14:section name="How it was built" id="{bf6d1303-bd52-922e-97f3-7d4f78ba1493}">
+        <p14:section name="How it was built" id="{feafd3b1-9194-e6a1-aa7c-69d346416b3a}">
           <p14:sldIdLst>
             <p14:sldId id="286"/>
             <p14:sldId id="287"/>
             <p14:sldId id="288"/>
           </p14:sldIdLst>
         </p14:section>
-        <p14:section name="Closing" id="{ec9e571a-0fd3-c5db-e60b-17ec3c6b523f}">
+        <p14:section name="Closing" id="{812d61fd-f54b-9eb3-abea-0827918cc902}">
           <p14:sldIdLst>
             <p14:sldId id="289"/>
           </p14:sldIdLst>
@@ -12003,7 +12003,7 @@
               <a:buNone/>
             </a:pPr>
             <a:r>
-              <a:rPr lang="en-US" sz="1150" dirty="0">
+              <a:rPr lang="en-US" sz="1250" dirty="0">
                 <a:solidFill>
                   <a:srgbClr val="8FB3A0"/>
                 </a:solidFill>
@@ -12011,16 +12011,16 @@
                 <a:ea typeface="Courier New" pitchFamily="34" charset="-122"/>
                 <a:cs typeface="Courier New" pitchFamily="34" charset="-120"/>
               </a:rPr>
-              <a:t>/* two axis-aligned rectangles overlap when they overlap on x AND on y */</a:t>
-            </a:r>
-            <a:endParaRPr lang="en-US" sz="1150" dirty="0"/>
-          </a:p>
-          <a:p>
-            <a:pPr indent="0" marL="0">
-              <a:buNone/>
-            </a:pPr>
-            <a:r>
-              <a:rPr lang="en-US" sz="1150" dirty="0">
+              <a:t>/* two axis-aligned rectangles overlap when they overlap on x AND on</a:t>
+            </a:r>
+            <a:endParaRPr lang="en-US" sz="1250" dirty="0"/>
+          </a:p>
+          <a:p>
+            <a:pPr indent="0" marL="0">
+              <a:buNone/>
+            </a:pPr>
+            <a:r>
+              <a:rPr lang="en-US" sz="1250" dirty="0">
                 <a:solidFill>
                   <a:srgbClr val="E6EDF2"/>
                 </a:solidFill>
@@ -12028,116 +12028,133 @@
                 <a:ea typeface="Courier New" pitchFamily="34" charset="-122"/>
                 <a:cs typeface="Courier New" pitchFamily="34" charset="-120"/>
               </a:rPr>
-              <a:t>int hit = ax &lt; bx + bw &amp;&amp;      </a:t>
-            </a:r>
-            <a:pPr indent="0" marL="0">
-              <a:buNone/>
-            </a:pPr>
-            <a:r>
-              <a:rPr lang="en-US" sz="1150" dirty="0">
-                <a:solidFill>
-                  <a:srgbClr val="8FB3A0"/>
+              <a:t>    y */</a:t>
+            </a:r>
+            <a:endParaRPr lang="en-US" sz="1250" dirty="0"/>
+          </a:p>
+          <a:p>
+            <a:pPr indent="0" marL="0">
+              <a:buNone/>
+            </a:pPr>
+            <a:r>
+              <a:rPr lang="en-US" sz="1250" dirty="0">
+                <a:solidFill>
+                  <a:srgbClr val="E6EDF2"/>
                 </a:solidFill>
                 <a:latin typeface="Courier New" pitchFamily="34" charset="0"/>
                 <a:ea typeface="Courier New" pitchFamily="34" charset="-122"/>
                 <a:cs typeface="Courier New" pitchFamily="34" charset="-120"/>
               </a:rPr>
-              <a:t>/* a's left  is left of b's right  */</a:t>
-            </a:r>
-            <a:endParaRPr lang="en-US" sz="1150" dirty="0"/>
-          </a:p>
-          <a:p>
-            <a:pPr indent="0" marL="0">
-              <a:buNone/>
-            </a:pPr>
-            <a:r>
-              <a:rPr lang="en-US" sz="1150" dirty="0">
-                <a:solidFill>
-                  <a:srgbClr val="E6EDF2"/>
+              <a:t>int hit = ax &lt; bx + bw &amp;&amp;      </a:t>
+            </a:r>
+            <a:pPr indent="0" marL="0">
+              <a:buNone/>
+            </a:pPr>
+            <a:r>
+              <a:rPr lang="en-US" sz="1250" dirty="0">
+                <a:solidFill>
+                  <a:srgbClr val="8FB3A0"/>
                 </a:solidFill>
                 <a:latin typeface="Courier New" pitchFamily="34" charset="0"/>
                 <a:ea typeface="Courier New" pitchFamily="34" charset="-122"/>
                 <a:cs typeface="Courier New" pitchFamily="34" charset="-120"/>
               </a:rPr>
-              <a:t>          ax + aw &gt; bx &amp;&amp;      </a:t>
-            </a:r>
-            <a:pPr indent="0" marL="0">
-              <a:buNone/>
-            </a:pPr>
-            <a:r>
-              <a:rPr lang="en-US" sz="1150" dirty="0">
-                <a:solidFill>
-                  <a:srgbClr val="8FB3A0"/>
+              <a:t>/* a's left  is left of b's right  */</a:t>
+            </a:r>
+            <a:endParaRPr lang="en-US" sz="1250" dirty="0"/>
+          </a:p>
+          <a:p>
+            <a:pPr indent="0" marL="0">
+              <a:buNone/>
+            </a:pPr>
+            <a:r>
+              <a:rPr lang="en-US" sz="1250" dirty="0">
+                <a:solidFill>
+                  <a:srgbClr val="E6EDF2"/>
                 </a:solidFill>
                 <a:latin typeface="Courier New" pitchFamily="34" charset="0"/>
                 <a:ea typeface="Courier New" pitchFamily="34" charset="-122"/>
                 <a:cs typeface="Courier New" pitchFamily="34" charset="-120"/>
               </a:rPr>
-              <a:t>/* a's right is right of b's left  */</a:t>
-            </a:r>
-            <a:endParaRPr lang="en-US" sz="1150" dirty="0"/>
-          </a:p>
-          <a:p>
-            <a:pPr indent="0" marL="0">
-              <a:buNone/>
-            </a:pPr>
-            <a:r>
-              <a:rPr lang="en-US" sz="1150" dirty="0">
-                <a:solidFill>
-                  <a:srgbClr val="E6EDF2"/>
+              <a:t>          ax + aw &gt; bx &amp;&amp;      </a:t>
+            </a:r>
+            <a:pPr indent="0" marL="0">
+              <a:buNone/>
+            </a:pPr>
+            <a:r>
+              <a:rPr lang="en-US" sz="1250" dirty="0">
+                <a:solidFill>
+                  <a:srgbClr val="8FB3A0"/>
                 </a:solidFill>
                 <a:latin typeface="Courier New" pitchFamily="34" charset="0"/>
                 <a:ea typeface="Courier New" pitchFamily="34" charset="-122"/>
                 <a:cs typeface="Courier New" pitchFamily="34" charset="-120"/>
               </a:rPr>
-              <a:t>          ay &lt; by + bh &amp;&amp;      </a:t>
-            </a:r>
-            <a:pPr indent="0" marL="0">
-              <a:buNone/>
-            </a:pPr>
-            <a:r>
-              <a:rPr lang="en-US" sz="1150" dirty="0">
-                <a:solidFill>
-                  <a:srgbClr val="8FB3A0"/>
+              <a:t>/* a's right is right of b's left  */</a:t>
+            </a:r>
+            <a:endParaRPr lang="en-US" sz="1250" dirty="0"/>
+          </a:p>
+          <a:p>
+            <a:pPr indent="0" marL="0">
+              <a:buNone/>
+            </a:pPr>
+            <a:r>
+              <a:rPr lang="en-US" sz="1250" dirty="0">
+                <a:solidFill>
+                  <a:srgbClr val="E6EDF2"/>
                 </a:solidFill>
                 <a:latin typeface="Courier New" pitchFamily="34" charset="0"/>
                 <a:ea typeface="Courier New" pitchFamily="34" charset="-122"/>
                 <a:cs typeface="Courier New" pitchFamily="34" charset="-120"/>
               </a:rPr>
-              <a:t>/* a's top   is above b's bottom   */</a:t>
-            </a:r>
-            <a:endParaRPr lang="en-US" sz="1150" dirty="0"/>
-          </a:p>
-          <a:p>
-            <a:pPr indent="0" marL="0">
-              <a:buNone/>
-            </a:pPr>
-            <a:r>
-              <a:rPr lang="en-US" sz="1150" dirty="0">
-                <a:solidFill>
-                  <a:srgbClr val="E6EDF2"/>
+              <a:t>          ay &lt; by + bh &amp;&amp;      </a:t>
+            </a:r>
+            <a:pPr indent="0" marL="0">
+              <a:buNone/>
+            </a:pPr>
+            <a:r>
+              <a:rPr lang="en-US" sz="1250" dirty="0">
+                <a:solidFill>
+                  <a:srgbClr val="8FB3A0"/>
                 </a:solidFill>
                 <a:latin typeface="Courier New" pitchFamily="34" charset="0"/>
                 <a:ea typeface="Courier New" pitchFamily="34" charset="-122"/>
                 <a:cs typeface="Courier New" pitchFamily="34" charset="-120"/>
               </a:rPr>
-              <a:t>          ay + ah &gt; by;        </a:t>
-            </a:r>
-            <a:pPr indent="0" marL="0">
-              <a:buNone/>
-            </a:pPr>
-            <a:r>
-              <a:rPr lang="en-US" sz="1150" dirty="0">
-                <a:solidFill>
-                  <a:srgbClr val="8FB3A0"/>
+              <a:t>/* a's top   is above b's bottom   */</a:t>
+            </a:r>
+            <a:endParaRPr lang="en-US" sz="1250" dirty="0"/>
+          </a:p>
+          <a:p>
+            <a:pPr indent="0" marL="0">
+              <a:buNone/>
+            </a:pPr>
+            <a:r>
+              <a:rPr lang="en-US" sz="1250" dirty="0">
+                <a:solidFill>
+                  <a:srgbClr val="E6EDF2"/>
                 </a:solidFill>
                 <a:latin typeface="Courier New" pitchFamily="34" charset="0"/>
                 <a:ea typeface="Courier New" pitchFamily="34" charset="-122"/>
                 <a:cs typeface="Courier New" pitchFamily="34" charset="-120"/>
               </a:rPr>
+              <a:t>          ay + ah &gt; by;        </a:t>
+            </a:r>
+            <a:pPr indent="0" marL="0">
+              <a:buNone/>
+            </a:pPr>
+            <a:r>
+              <a:rPr lang="en-US" sz="1250" dirty="0">
+                <a:solidFill>
+                  <a:srgbClr val="8FB3A0"/>
+                </a:solidFill>
+                <a:latin typeface="Courier New" pitchFamily="34" charset="0"/>
+                <a:ea typeface="Courier New" pitchFamily="34" charset="-122"/>
+                <a:cs typeface="Courier New" pitchFamily="34" charset="-120"/>
+              </a:rPr>
               <a:t>/* a's bottom is below b's top     */</a:t>
             </a:r>
-            <a:endParaRPr lang="en-US" sz="1150" dirty="0"/>
+            <a:endParaRPr lang="en-US" sz="1250" dirty="0"/>
           </a:p>
         </p:txBody>
       </p:sp>
@@ -14317,7 +14334,7 @@
               <a:buNone/>
             </a:pPr>
             <a:r>
-              <a:rPr lang="en-US" sz="1200" dirty="0">
+              <a:rPr lang="en-US" sz="1250" dirty="0">
                 <a:solidFill>
                   <a:srgbClr val="8FB3A0"/>
                 </a:solidFill>
@@ -14327,14 +14344,14 @@
               </a:rPr>
               <a:t># reverse direction</a:t>
             </a:r>
-            <a:endParaRPr lang="en-US" sz="1200" dirty="0"/>
-          </a:p>
-          <a:p>
-            <a:pPr indent="0" marL="0">
-              <a:buNone/>
-            </a:pPr>
-            <a:r>
-              <a:rPr lang="en-US" sz="1200" dirty="0">
+            <a:endParaRPr lang="en-US" sz="1250" dirty="0"/>
+          </a:p>
+          <a:p>
+            <a:pPr indent="0" marL="0">
+              <a:buNone/>
+            </a:pPr>
+            <a:r>
+              <a:rPr lang="en-US" sz="1250" dirty="0">
                 <a:solidFill>
                   <a:srgbClr val="E6EDF2"/>
                 </a:solidFill>
@@ -14344,14 +14361,14 @@
               </a:rPr>
               <a:t>la   t0, ball_dy</a:t>
             </a:r>
-            <a:endParaRPr lang="en-US" sz="1200" dirty="0"/>
-          </a:p>
-          <a:p>
-            <a:pPr indent="0" marL="0">
-              <a:buNone/>
-            </a:pPr>
-            <a:r>
-              <a:rPr lang="en-US" sz="1200" dirty="0">
+            <a:endParaRPr lang="en-US" sz="1250" dirty="0"/>
+          </a:p>
+          <a:p>
+            <a:pPr indent="0" marL="0">
+              <a:buNone/>
+            </a:pPr>
+            <a:r>
+              <a:rPr lang="en-US" sz="1250" dirty="0">
                 <a:solidFill>
                   <a:srgbClr val="E6EDF2"/>
                 </a:solidFill>
@@ -14361,14 +14378,14 @@
               </a:rPr>
               <a:t>lw   t1, 0(t0)</a:t>
             </a:r>
-            <a:endParaRPr lang="en-US" sz="1200" dirty="0"/>
-          </a:p>
-          <a:p>
-            <a:pPr indent="0" marL="0">
-              <a:buNone/>
-            </a:pPr>
-            <a:r>
-              <a:rPr lang="en-US" sz="1200" dirty="0">
+            <a:endParaRPr lang="en-US" sz="1250" dirty="0"/>
+          </a:p>
+          <a:p>
+            <a:pPr indent="0" marL="0">
+              <a:buNone/>
+            </a:pPr>
+            <a:r>
+              <a:rPr lang="en-US" sz="1250" dirty="0">
                 <a:solidFill>
                   <a:srgbClr val="E6EDF2"/>
                 </a:solidFill>
@@ -14382,7 +14399,7 @@
               <a:buNone/>
             </a:pPr>
             <a:r>
-              <a:rPr lang="en-US" sz="1200" dirty="0">
+              <a:rPr lang="en-US" sz="1250" dirty="0">
                 <a:solidFill>
                   <a:srgbClr val="8FB3A0"/>
                 </a:solidFill>
@@ -14390,16 +14407,16 @@
                 <a:ea typeface="Courier New" pitchFamily="34" charset="-122"/>
                 <a:cs typeface="Courier New" pitchFamily="34" charset="-120"/>
               </a:rPr>
-              <a:t># only bounce if ball is moving down (t1 &gt; 0)</a:t>
-            </a:r>
-            <a:endParaRPr lang="en-US" sz="1200" dirty="0"/>
-          </a:p>
-          <a:p>
-            <a:pPr indent="0" marL="0">
-              <a:buNone/>
-            </a:pPr>
-            <a:r>
-              <a:rPr lang="en-US" sz="1200" dirty="0">
+              <a:t># only bounce if ball is moving down (t1 &gt;</a:t>
+            </a:r>
+            <a:endParaRPr lang="en-US" sz="1250" dirty="0"/>
+          </a:p>
+          <a:p>
+            <a:pPr indent="0" marL="0">
+              <a:buNone/>
+            </a:pPr>
+            <a:r>
+              <a:rPr lang="en-US" sz="1250" dirty="0">
                 <a:solidFill>
                   <a:srgbClr val="E6EDF2"/>
                 </a:solidFill>
@@ -14407,40 +14424,57 @@
                 <a:ea typeface="Courier New" pitchFamily="34" charset="-122"/>
                 <a:cs typeface="Courier New" pitchFamily="34" charset="-120"/>
               </a:rPr>
-              <a:t>neg  t1, t1               </a:t>
-            </a:r>
-            <a:pPr indent="0" marL="0">
-              <a:buNone/>
-            </a:pPr>
-            <a:r>
-              <a:rPr lang="en-US" sz="1200" dirty="0">
-                <a:solidFill>
-                  <a:srgbClr val="8FB3A0"/>
+              <a:t>    0)</a:t>
+            </a:r>
+            <a:endParaRPr lang="en-US" sz="1250" dirty="0"/>
+          </a:p>
+          <a:p>
+            <a:pPr indent="0" marL="0">
+              <a:buNone/>
+            </a:pPr>
+            <a:r>
+              <a:rPr lang="en-US" sz="1250" dirty="0">
+                <a:solidFill>
+                  <a:srgbClr val="E6EDF2"/>
                 </a:solidFill>
                 <a:latin typeface="Courier New" pitchFamily="34" charset="0"/>
                 <a:ea typeface="Courier New" pitchFamily="34" charset="-122"/>
                 <a:cs typeface="Courier New" pitchFamily="34" charset="-120"/>
               </a:rPr>
-              <a:t># Reverse dy natively</a:t>
-            </a:r>
-            <a:endParaRPr lang="en-US" sz="1200" dirty="0"/>
-          </a:p>
-          <a:p>
-            <a:pPr indent="0" marL="0">
-              <a:buNone/>
-            </a:pPr>
-            <a:r>
-              <a:rPr lang="en-US" sz="1200" dirty="0">
-                <a:solidFill>
-                  <a:srgbClr val="E6EDF2"/>
+              <a:t>neg  t1, t1               </a:t>
+            </a:r>
+            <a:pPr indent="0" marL="0">
+              <a:buNone/>
+            </a:pPr>
+            <a:r>
+              <a:rPr lang="en-US" sz="1250" dirty="0">
+                <a:solidFill>
+                  <a:srgbClr val="8FB3A0"/>
                 </a:solidFill>
                 <a:latin typeface="Courier New" pitchFamily="34" charset="0"/>
                 <a:ea typeface="Courier New" pitchFamily="34" charset="-122"/>
                 <a:cs typeface="Courier New" pitchFamily="34" charset="-120"/>
               </a:rPr>
+              <a:t># Reverse dy natively</a:t>
+            </a:r>
+            <a:endParaRPr lang="en-US" sz="1250" dirty="0"/>
+          </a:p>
+          <a:p>
+            <a:pPr indent="0" marL="0">
+              <a:buNone/>
+            </a:pPr>
+            <a:r>
+              <a:rPr lang="en-US" sz="1250" dirty="0">
+                <a:solidFill>
+                  <a:srgbClr val="E6EDF2"/>
+                </a:solidFill>
+                <a:latin typeface="Courier New" pitchFamily="34" charset="0"/>
+                <a:ea typeface="Courier New" pitchFamily="34" charset="-122"/>
+                <a:cs typeface="Courier New" pitchFamily="34" charset="-120"/>
+              </a:rPr>
               <a:t>sw   t1, 0(t0)</a:t>
             </a:r>
-            <a:endParaRPr lang="en-US" sz="1200" dirty="0"/>
+            <a:endParaRPr lang="en-US" sz="1250" dirty="0"/>
           </a:p>
         </p:txBody>
       </p:sp>
